--- a/research_articles/dcr_charts_gitissues/dcr_charts_01.pptx
+++ b/research_articles/dcr_charts_gitissues/dcr_charts_01.pptx
@@ -226,7 +226,7 @@
           <a:p>
             <a:fld id="{0E14D5B3-C0ED-4E5B-BEFF-6A7BA239570E}" type="datetimeFigureOut">
               <a:rPr lang="en-AU" smtClean="0"/>
-              <a:t>13-Apr-20</a:t>
+              <a:t>17-Apr-20</a:t>
             </a:fld>
             <a:endParaRPr lang="en-AU"/>
           </a:p>
@@ -2318,7 +2318,7 @@
           <a:p>
             <a:fld id="{B897D379-7DB5-4F5B-A6CE-2518FE7EEDA5}" type="datetime1">
               <a:rPr lang="en-AU" smtClean="0"/>
-              <a:t>13-Apr-20</a:t>
+              <a:t>17-Apr-20</a:t>
             </a:fld>
             <a:endParaRPr lang="en-AU"/>
           </a:p>
@@ -5340,8 +5340,8 @@
           </a:p>
         </p:txBody>
       </p:sp>
-      <mc:AlternateContent xmlns:mc="http://schemas.openxmlformats.org/markup-compatibility/2006">
-        <mc:Choice xmlns:a14="http://schemas.microsoft.com/office/drawing/2010/main" Requires="a14">
+      <mc:AlternateContent xmlns:mc="http://schemas.openxmlformats.org/markup-compatibility/2006" xmlns:a14="http://schemas.microsoft.com/office/drawing/2010/main">
+        <mc:Choice Requires="a14">
           <p:graphicFrame>
             <p:nvGraphicFramePr>
               <p:cNvPr id="4" name="Table 4">
@@ -5922,25 +5922,7 @@
                                   </a:solidFill>
                                   <a:latin typeface="Cambria Math" panose="02040503050406030204" pitchFamily="18" charset="0"/>
                                 </a:rPr>
-                                <m:t>𝐶𝑎𝑝</m:t>
-                              </m:r>
-                              <m:r>
-                                <a:rPr lang="en-US" sz="1400" b="0" i="1" smtClean="0">
-                                  <a:solidFill>
-                                    <a:srgbClr val="000000"/>
-                                  </a:solidFill>
-                                  <a:latin typeface="Cambria Math" panose="02040503050406030204" pitchFamily="18" charset="0"/>
-                                </a:rPr>
-                                <m:t>𝑅𝑒𝑎𝑙</m:t>
-                              </m:r>
-                              <m:r>
-                                <a:rPr lang="en-US" sz="1400" b="0" i="1" smtClean="0">
-                                  <a:solidFill>
-                                    <a:srgbClr val="000000"/>
-                                  </a:solidFill>
-                                  <a:latin typeface="Cambria Math" panose="02040503050406030204" pitchFamily="18" charset="0"/>
-                                </a:rPr>
-                                <m:t>𝑈𝑆𝐷</m:t>
+                                <m:t>𝐶𝑎𝑝𝑅𝑒𝑎𝑙𝑈𝑆𝐷</m:t>
                               </m:r>
                             </m:oMath>
                           </a14:m>
@@ -6193,7 +6175,7 @@
             </a:graphic>
           </p:graphicFrame>
         </mc:Choice>
-        <mc:Fallback>
+        <mc:Fallback xmlns="">
           <p:graphicFrame>
             <p:nvGraphicFramePr>
               <p:cNvPr id="4" name="Table 4">
@@ -6926,8 +6908,8 @@
           </a:p>
         </p:txBody>
       </p:sp>
-      <mc:AlternateContent xmlns:mc="http://schemas.openxmlformats.org/markup-compatibility/2006">
-        <mc:Choice xmlns:a14="http://schemas.microsoft.com/office/drawing/2010/main" Requires="a14">
+      <mc:AlternateContent xmlns:mc="http://schemas.openxmlformats.org/markup-compatibility/2006" xmlns:a14="http://schemas.microsoft.com/office/drawing/2010/main">
+        <mc:Choice Requires="a14">
           <p:graphicFrame>
             <p:nvGraphicFramePr>
               <p:cNvPr id="4" name="Table 4">
@@ -7902,7 +7884,7 @@
             </a:graphic>
           </p:graphicFrame>
         </mc:Choice>
-        <mc:Fallback>
+        <mc:Fallback xmlns="">
           <p:graphicFrame>
             <p:nvGraphicFramePr>
               <p:cNvPr id="4" name="Table 4">
@@ -8961,8 +8943,8 @@
           </a:p>
         </p:txBody>
       </p:sp>
-      <mc:AlternateContent xmlns:mc="http://schemas.openxmlformats.org/markup-compatibility/2006">
-        <mc:Choice xmlns:a14="http://schemas.microsoft.com/office/drawing/2010/main" Requires="a14">
+      <mc:AlternateContent xmlns:mc="http://schemas.openxmlformats.org/markup-compatibility/2006" xmlns:a14="http://schemas.microsoft.com/office/drawing/2010/main">
+        <mc:Choice Requires="a14">
           <p:graphicFrame>
             <p:nvGraphicFramePr>
               <p:cNvPr id="4" name="Table 4">
@@ -10052,16 +10034,7 @@
                                             </a:solidFill>
                                             <a:latin typeface="Cambria Math" panose="02040503050406030204" pitchFamily="18" charset="0"/>
                                           </a:rPr>
-                                          <m:t>3</m:t>
-                                        </m:r>
-                                        <m:r>
-                                          <a:rPr lang="en-US" sz="1400" b="0" i="0" smtClean="0">
-                                            <a:solidFill>
-                                              <a:srgbClr val="000000"/>
-                                            </a:solidFill>
-                                            <a:latin typeface="Cambria Math" panose="02040503050406030204" pitchFamily="18" charset="0"/>
-                                          </a:rPr>
-                                          <m:t>+</m:t>
+                                          <m:t>3+</m:t>
                                         </m:r>
                                         <m:r>
                                           <m:rPr>
@@ -10287,16 +10260,7 @@
                                             </a:solidFill>
                                             <a:latin typeface="Cambria Math" panose="02040503050406030204" pitchFamily="18" charset="0"/>
                                           </a:rPr>
-                                          <m:t>1</m:t>
-                                        </m:r>
-                                        <m:r>
-                                          <a:rPr lang="en-US" sz="1400" b="0" i="0" smtClean="0">
-                                            <a:solidFill>
-                                              <a:srgbClr val="000000"/>
-                                            </a:solidFill>
-                                            <a:latin typeface="Cambria Math" panose="02040503050406030204" pitchFamily="18" charset="0"/>
-                                          </a:rPr>
-                                          <m:t>+</m:t>
+                                          <m:t>1+</m:t>
                                         </m:r>
                                         <m:r>
                                           <m:rPr>
@@ -10379,7 +10343,7 @@
             </a:graphic>
           </p:graphicFrame>
         </mc:Choice>
-        <mc:Fallback>
+        <mc:Fallback xmlns="">
           <p:graphicFrame>
             <p:nvGraphicFramePr>
               <p:cNvPr id="4" name="Table 4">
@@ -11541,7 +11505,7 @@
           <a:p>
             <a:r>
               <a:rPr lang="en-US" dirty="0"/>
-              <a:t>X</a:t>
+              <a:t>Difficulty Ribbon</a:t>
             </a:r>
             <a:endParaRPr lang="en-AU" dirty="0"/>
           </a:p>
@@ -11577,430 +11541,1099 @@
           <a:p>
             <a:r>
               <a:rPr lang="en-US" sz="1400" dirty="0"/>
-              <a:t>Desc</a:t>
+              <a:t>The difficulty ribbon was developed by Willy Woo (@</a:t>
             </a:r>
-          </a:p>
-          <a:p>
             <a:r>
-              <a:rPr lang="en-US" sz="1400" b="1" dirty="0"/>
-              <a:t>Note – </a:t>
+              <a:rPr lang="en-US" sz="1400" dirty="0" err="1"/>
+              <a:t>woonomic</a:t>
             </a:r>
-            <a:endParaRPr lang="en-AU" sz="1400" b="1" dirty="0"/>
+            <a:r>
+              <a:rPr lang="en-US" sz="1400" dirty="0"/>
+              <a:t>) as a series of moving averages applied to protocol mining difficulty. During periods of hash-rate expansion, the ribbon will trend higher </a:t>
+            </a:r>
           </a:p>
         </p:txBody>
       </p:sp>
-      <p:graphicFrame>
-        <p:nvGraphicFramePr>
-          <p:cNvPr id="4" name="Table 4">
-            <a:extLst>
-              <a:ext uri="{FF2B5EF4-FFF2-40B4-BE49-F238E27FC236}">
-                <a16:creationId xmlns:a16="http://schemas.microsoft.com/office/drawing/2014/main" id="{87D8962A-526C-40F0-9EB2-4869D124ECF1}"/>
-              </a:ext>
-            </a:extLst>
-          </p:cNvPr>
-          <p:cNvGraphicFramePr>
-            <a:graphicFrameLocks noGrp="1"/>
-          </p:cNvGraphicFramePr>
-          <p:nvPr>
-            <p:extLst>
-              <p:ext uri="{D42A27DB-BD31-4B8C-83A1-F6EECF244321}">
-                <p14:modId xmlns:p14="http://schemas.microsoft.com/office/powerpoint/2010/main" val="4104509824"/>
-              </p:ext>
-            </p:extLst>
-          </p:nvPr>
-        </p:nvGraphicFramePr>
-        <p:xfrm>
-          <a:off x="194239" y="3070025"/>
-          <a:ext cx="10760273" cy="1219200"/>
-        </p:xfrm>
-        <a:graphic>
-          <a:graphicData uri="http://schemas.openxmlformats.org/drawingml/2006/table">
-            <a:tbl>
-              <a:tblPr firstRow="1" bandRow="1">
-                <a:tableStyleId>{5C22544A-7EE6-4342-B048-85BDC9FD1C3A}</a:tableStyleId>
-              </a:tblPr>
-              <a:tblGrid>
-                <a:gridCol w="1901854">
-                  <a:extLst>
-                    <a:ext uri="{9D8B030D-6E8A-4147-A177-3AD203B41FA5}">
-                      <a16:colId xmlns:a16="http://schemas.microsoft.com/office/drawing/2014/main" val="3592528886"/>
-                    </a:ext>
-                  </a:extLst>
-                </a:gridCol>
-                <a:gridCol w="723894">
-                  <a:extLst>
-                    <a:ext uri="{9D8B030D-6E8A-4147-A177-3AD203B41FA5}">
-                      <a16:colId xmlns:a16="http://schemas.microsoft.com/office/drawing/2014/main" val="35831559"/>
-                    </a:ext>
-                  </a:extLst>
-                </a:gridCol>
-                <a:gridCol w="5136801">
-                  <a:extLst>
-                    <a:ext uri="{9D8B030D-6E8A-4147-A177-3AD203B41FA5}">
-                      <a16:colId xmlns:a16="http://schemas.microsoft.com/office/drawing/2014/main" val="1110526237"/>
-                    </a:ext>
-                  </a:extLst>
-                </a:gridCol>
-                <a:gridCol w="2997724">
-                  <a:extLst>
-                    <a:ext uri="{9D8B030D-6E8A-4147-A177-3AD203B41FA5}">
-                      <a16:colId xmlns:a16="http://schemas.microsoft.com/office/drawing/2014/main" val="3582886717"/>
-                    </a:ext>
-                  </a:extLst>
-                </a:gridCol>
-              </a:tblGrid>
-              <a:tr h="295881">
-                <a:tc>
-                  <a:txBody>
-                    <a:bodyPr/>
-                    <a:lstStyle/>
-                    <a:p>
-                      <a:pPr algn="ctr"/>
-                      <a:r>
-                        <a:rPr lang="en-US" sz="1400" dirty="0"/>
-                        <a:t>Metric</a:t>
-                      </a:r>
-                      <a:endParaRPr lang="en-AU" sz="1400" dirty="0"/>
-                    </a:p>
-                  </a:txBody>
-                  <a:tcPr>
-                    <a:solidFill>
-                      <a:srgbClr val="091440"/>
-                    </a:solidFill>
-                  </a:tcPr>
-                </a:tc>
-                <a:tc>
-                  <a:txBody>
-                    <a:bodyPr/>
-                    <a:lstStyle/>
-                    <a:p>
-                      <a:pPr algn="ctr"/>
-                      <a:r>
-                        <a:rPr lang="en-US" sz="1400" dirty="0"/>
-                        <a:t>Axis</a:t>
-                      </a:r>
-                      <a:endParaRPr lang="en-AU" sz="1400" dirty="0"/>
-                    </a:p>
-                  </a:txBody>
-                  <a:tcPr>
-                    <a:solidFill>
-                      <a:srgbClr val="091440"/>
-                    </a:solidFill>
-                  </a:tcPr>
-                </a:tc>
-                <a:tc>
-                  <a:txBody>
-                    <a:bodyPr/>
-                    <a:lstStyle/>
-                    <a:p>
-                      <a:pPr algn="ctr"/>
-                      <a:r>
-                        <a:rPr lang="en-US" sz="1400" dirty="0"/>
-                        <a:t>Calculation</a:t>
-                      </a:r>
-                      <a:endParaRPr lang="en-AU" sz="1400" dirty="0"/>
-                    </a:p>
-                  </a:txBody>
-                  <a:tcPr>
-                    <a:solidFill>
-                      <a:srgbClr val="091440"/>
-                    </a:solidFill>
-                  </a:tcPr>
-                </a:tc>
-                <a:tc>
-                  <a:txBody>
-                    <a:bodyPr/>
-                    <a:lstStyle/>
-                    <a:p>
-                      <a:pPr algn="ctr"/>
-                      <a:r>
-                        <a:rPr lang="en-US" sz="1400" dirty="0"/>
-                        <a:t>Naming Convention</a:t>
-                      </a:r>
-                      <a:endParaRPr lang="en-AU" sz="1400" dirty="0"/>
-                    </a:p>
-                  </a:txBody>
-                  <a:tcPr>
-                    <a:solidFill>
-                      <a:srgbClr val="091440"/>
-                    </a:solidFill>
-                  </a:tcPr>
-                </a:tc>
+      <mc:AlternateContent xmlns:mc="http://schemas.openxmlformats.org/markup-compatibility/2006">
+        <mc:Choice xmlns:a14="http://schemas.microsoft.com/office/drawing/2010/main" Requires="a14">
+          <p:graphicFrame>
+            <p:nvGraphicFramePr>
+              <p:cNvPr id="4" name="Table 4">
                 <a:extLst>
-                  <a:ext uri="{0D108BD9-81ED-4DB2-BD59-A6C34878D82A}">
-                    <a16:rowId xmlns:a16="http://schemas.microsoft.com/office/drawing/2014/main" val="2118214685"/>
+                  <a:ext uri="{FF2B5EF4-FFF2-40B4-BE49-F238E27FC236}">
+                    <a16:creationId xmlns:a16="http://schemas.microsoft.com/office/drawing/2014/main" id="{87D8962A-526C-40F0-9EB2-4869D124ECF1}"/>
                   </a:ext>
                 </a:extLst>
-              </a:tr>
-              <a:tr h="0">
-                <a:tc>
-                  <a:txBody>
-                    <a:bodyPr/>
-                    <a:lstStyle/>
-                    <a:p>
-                      <a:pPr algn="ctr"/>
-                      <a:endParaRPr lang="en-AU" sz="1400" b="1" dirty="0">
-                        <a:solidFill>
-                          <a:srgbClr val="000000"/>
-                        </a:solidFill>
-                      </a:endParaRPr>
-                    </a:p>
-                  </a:txBody>
-                  <a:tcPr anchor="ctr">
-                    <a:solidFill>
-                      <a:srgbClr val="C0CAF6"/>
-                    </a:solidFill>
-                  </a:tcPr>
-                </a:tc>
-                <a:tc>
-                  <a:txBody>
-                    <a:bodyPr/>
-                    <a:lstStyle/>
-                    <a:p>
-                      <a:pPr algn="ctr"/>
-                      <a:endParaRPr lang="en-AU" sz="1400" dirty="0">
-                        <a:solidFill>
-                          <a:srgbClr val="000000"/>
-                        </a:solidFill>
-                      </a:endParaRPr>
-                    </a:p>
-                  </a:txBody>
-                  <a:tcPr anchor="ctr">
-                    <a:solidFill>
-                      <a:srgbClr val="C0CAF6"/>
-                    </a:solidFill>
-                  </a:tcPr>
-                </a:tc>
-                <a:tc>
-                  <a:txBody>
-                    <a:bodyPr/>
-                    <a:lstStyle/>
-                    <a:p>
-                      <a:pPr marL="0" marR="0" lvl="0" indent="0" algn="ctr" defTabSz="914400" rtl="0" eaLnBrk="1" fontAlgn="auto" latinLnBrk="0" hangingPunct="1">
-                        <a:lnSpc>
-                          <a:spcPct val="100000"/>
-                        </a:lnSpc>
-                        <a:spcBef>
-                          <a:spcPts val="0"/>
-                        </a:spcBef>
-                        <a:spcAft>
-                          <a:spcPts val="0"/>
-                        </a:spcAft>
-                        <a:buClrTx/>
-                        <a:buSzTx/>
-                        <a:buFontTx/>
-                        <a:buNone/>
-                        <a:tabLst/>
-                        <a:defRPr/>
-                      </a:pPr>
-                      <a:endParaRPr lang="en-AU" sz="1400" dirty="0">
-                        <a:solidFill>
-                          <a:srgbClr val="000000"/>
-                        </a:solidFill>
-                      </a:endParaRPr>
-                    </a:p>
-                  </a:txBody>
-                  <a:tcPr anchor="ctr">
-                    <a:solidFill>
-                      <a:srgbClr val="C0CAF6"/>
-                    </a:solidFill>
-                  </a:tcPr>
-                </a:tc>
-                <a:tc>
-                  <a:txBody>
-                    <a:bodyPr/>
-                    <a:lstStyle/>
-                    <a:p>
-                      <a:pPr algn="ctr"/>
-                      <a:endParaRPr lang="en-AU" sz="1400" dirty="0">
-                        <a:solidFill>
-                          <a:srgbClr val="000000"/>
-                        </a:solidFill>
-                      </a:endParaRPr>
-                    </a:p>
-                  </a:txBody>
-                  <a:tcPr anchor="ctr">
-                    <a:solidFill>
-                      <a:srgbClr val="C0CAF6"/>
-                    </a:solidFill>
-                  </a:tcPr>
-                </a:tc>
+              </p:cNvPr>
+              <p:cNvGraphicFramePr>
+                <a:graphicFrameLocks noGrp="1"/>
+              </p:cNvGraphicFramePr>
+              <p:nvPr>
+                <p:extLst>
+                  <p:ext uri="{D42A27DB-BD31-4B8C-83A1-F6EECF244321}">
+                    <p14:modId xmlns:p14="http://schemas.microsoft.com/office/powerpoint/2010/main" val="1787008059"/>
+                  </p:ext>
+                </p:extLst>
+              </p:nvPr>
+            </p:nvGraphicFramePr>
+            <p:xfrm>
+              <a:off x="194239" y="3070025"/>
+              <a:ext cx="10760273" cy="1432560"/>
+            </p:xfrm>
+            <a:graphic>
+              <a:graphicData uri="http://schemas.openxmlformats.org/drawingml/2006/table">
+                <a:tbl>
+                  <a:tblPr firstRow="1" bandRow="1">
+                    <a:tableStyleId>{5C22544A-7EE6-4342-B048-85BDC9FD1C3A}</a:tableStyleId>
+                  </a:tblPr>
+                  <a:tblGrid>
+                    <a:gridCol w="1901854">
+                      <a:extLst>
+                        <a:ext uri="{9D8B030D-6E8A-4147-A177-3AD203B41FA5}">
+                          <a16:colId xmlns:a16="http://schemas.microsoft.com/office/drawing/2014/main" val="3592528886"/>
+                        </a:ext>
+                      </a:extLst>
+                    </a:gridCol>
+                    <a:gridCol w="723894">
+                      <a:extLst>
+                        <a:ext uri="{9D8B030D-6E8A-4147-A177-3AD203B41FA5}">
+                          <a16:colId xmlns:a16="http://schemas.microsoft.com/office/drawing/2014/main" val="35831559"/>
+                        </a:ext>
+                      </a:extLst>
+                    </a:gridCol>
+                    <a:gridCol w="5136801">
+                      <a:extLst>
+                        <a:ext uri="{9D8B030D-6E8A-4147-A177-3AD203B41FA5}">
+                          <a16:colId xmlns:a16="http://schemas.microsoft.com/office/drawing/2014/main" val="1110526237"/>
+                        </a:ext>
+                      </a:extLst>
+                    </a:gridCol>
+                    <a:gridCol w="2997724">
+                      <a:extLst>
+                        <a:ext uri="{9D8B030D-6E8A-4147-A177-3AD203B41FA5}">
+                          <a16:colId xmlns:a16="http://schemas.microsoft.com/office/drawing/2014/main" val="3582886717"/>
+                        </a:ext>
+                      </a:extLst>
+                    </a:gridCol>
+                  </a:tblGrid>
+                  <a:tr h="295881">
+                    <a:tc>
+                      <a:txBody>
+                        <a:bodyPr/>
+                        <a:lstStyle/>
+                        <a:p>
+                          <a:pPr algn="ctr"/>
+                          <a:r>
+                            <a:rPr lang="en-US" sz="1400" dirty="0"/>
+                            <a:t>Metric</a:t>
+                          </a:r>
+                          <a:endParaRPr lang="en-AU" sz="1400" dirty="0"/>
+                        </a:p>
+                      </a:txBody>
+                      <a:tcPr>
+                        <a:solidFill>
+                          <a:srgbClr val="091440"/>
+                        </a:solidFill>
+                      </a:tcPr>
+                    </a:tc>
+                    <a:tc>
+                      <a:txBody>
+                        <a:bodyPr/>
+                        <a:lstStyle/>
+                        <a:p>
+                          <a:pPr algn="ctr"/>
+                          <a:r>
+                            <a:rPr lang="en-US" sz="1400" dirty="0"/>
+                            <a:t>Axis</a:t>
+                          </a:r>
+                          <a:endParaRPr lang="en-AU" sz="1400" dirty="0"/>
+                        </a:p>
+                      </a:txBody>
+                      <a:tcPr>
+                        <a:solidFill>
+                          <a:srgbClr val="091440"/>
+                        </a:solidFill>
+                      </a:tcPr>
+                    </a:tc>
+                    <a:tc>
+                      <a:txBody>
+                        <a:bodyPr/>
+                        <a:lstStyle/>
+                        <a:p>
+                          <a:pPr algn="ctr"/>
+                          <a:r>
+                            <a:rPr lang="en-US" sz="1400" dirty="0"/>
+                            <a:t>Calculation</a:t>
+                          </a:r>
+                          <a:endParaRPr lang="en-AU" sz="1400" dirty="0"/>
+                        </a:p>
+                      </a:txBody>
+                      <a:tcPr>
+                        <a:solidFill>
+                          <a:srgbClr val="091440"/>
+                        </a:solidFill>
+                      </a:tcPr>
+                    </a:tc>
+                    <a:tc>
+                      <a:txBody>
+                        <a:bodyPr/>
+                        <a:lstStyle/>
+                        <a:p>
+                          <a:pPr algn="ctr"/>
+                          <a:r>
+                            <a:rPr lang="en-US" sz="1400" dirty="0"/>
+                            <a:t>Naming Convention</a:t>
+                          </a:r>
+                          <a:endParaRPr lang="en-AU" sz="1400" dirty="0"/>
+                        </a:p>
+                      </a:txBody>
+                      <a:tcPr>
+                        <a:solidFill>
+                          <a:srgbClr val="091440"/>
+                        </a:solidFill>
+                      </a:tcPr>
+                    </a:tc>
+                    <a:extLst>
+                      <a:ext uri="{0D108BD9-81ED-4DB2-BD59-A6C34878D82A}">
+                        <a16:rowId xmlns:a16="http://schemas.microsoft.com/office/drawing/2014/main" val="2118214685"/>
+                      </a:ext>
+                    </a:extLst>
+                  </a:tr>
+                  <a:tr h="0">
+                    <a:tc>
+                      <a:txBody>
+                        <a:bodyPr/>
+                        <a:lstStyle/>
+                        <a:p>
+                          <a:pPr algn="ctr"/>
+                          <a:r>
+                            <a:rPr lang="en-US" sz="1400" b="1" dirty="0">
+                              <a:solidFill>
+                                <a:srgbClr val="000000"/>
+                              </a:solidFill>
+                            </a:rPr>
+                            <a:t>Market Cap</a:t>
+                          </a:r>
+                          <a:endParaRPr lang="en-AU" sz="1400" b="1" dirty="0">
+                            <a:solidFill>
+                              <a:srgbClr val="000000"/>
+                            </a:solidFill>
+                          </a:endParaRPr>
+                        </a:p>
+                      </a:txBody>
+                      <a:tcPr anchor="ctr">
+                        <a:solidFill>
+                          <a:srgbClr val="C0CAF6"/>
+                        </a:solidFill>
+                      </a:tcPr>
+                    </a:tc>
+                    <a:tc>
+                      <a:txBody>
+                        <a:bodyPr/>
+                        <a:lstStyle/>
+                        <a:p>
+                          <a:pPr algn="ctr"/>
+                          <a:r>
+                            <a:rPr lang="en-US" sz="1400" dirty="0">
+                              <a:solidFill>
+                                <a:srgbClr val="000000"/>
+                              </a:solidFill>
+                            </a:rPr>
+                            <a:t>Left</a:t>
+                          </a:r>
+                          <a:endParaRPr lang="en-AU" sz="1400" dirty="0">
+                            <a:solidFill>
+                              <a:srgbClr val="000000"/>
+                            </a:solidFill>
+                          </a:endParaRPr>
+                        </a:p>
+                      </a:txBody>
+                      <a:tcPr anchor="ctr">
+                        <a:solidFill>
+                          <a:srgbClr val="C0CAF6"/>
+                        </a:solidFill>
+                      </a:tcPr>
+                    </a:tc>
+                    <a:tc>
+                      <a:txBody>
+                        <a:bodyPr/>
+                        <a:lstStyle/>
+                        <a:p>
+                          <a:pPr marL="0" marR="0" lvl="0" indent="0" algn="ctr" defTabSz="914400" rtl="0" eaLnBrk="1" fontAlgn="auto" latinLnBrk="0" hangingPunct="1">
+                            <a:lnSpc>
+                              <a:spcPct val="100000"/>
+                            </a:lnSpc>
+                            <a:spcBef>
+                              <a:spcPts val="0"/>
+                            </a:spcBef>
+                            <a:spcAft>
+                              <a:spcPts val="0"/>
+                            </a:spcAft>
+                            <a:buClrTx/>
+                            <a:buSzTx/>
+                            <a:buFontTx/>
+                            <a:buNone/>
+                            <a:tabLst/>
+                            <a:defRPr/>
+                          </a:pPr>
+                          <a14:m>
+                            <m:oMathPara xmlns:m="http://schemas.openxmlformats.org/officeDocument/2006/math">
+                              <m:oMathParaPr>
+                                <m:jc m:val="centerGroup"/>
+                              </m:oMathParaPr>
+                              <m:oMath xmlns:m="http://schemas.openxmlformats.org/officeDocument/2006/math">
+                                <m:r>
+                                  <a:rPr lang="en-US" sz="1400" b="0" i="1" smtClean="0">
+                                    <a:solidFill>
+                                      <a:srgbClr val="000000"/>
+                                    </a:solidFill>
+                                    <a:latin typeface="Cambria Math" panose="02040503050406030204" pitchFamily="18" charset="0"/>
+                                  </a:rPr>
+                                  <m:t>𝑆𝑝𝑙𝑦𝐶𝑢𝑟</m:t>
+                                </m:r>
+                                <m:r>
+                                  <a:rPr lang="en-US" sz="1400" b="0" i="1" smtClean="0">
+                                    <a:solidFill>
+                                      <a:srgbClr val="000000"/>
+                                    </a:solidFill>
+                                    <a:latin typeface="Cambria Math" panose="02040503050406030204" pitchFamily="18" charset="0"/>
+                                  </a:rPr>
+                                  <m:t>∗</m:t>
+                                </m:r>
+                                <m:r>
+                                  <a:rPr lang="en-US" sz="1400" b="0" i="1" smtClean="0">
+                                    <a:solidFill>
+                                      <a:srgbClr val="000000"/>
+                                    </a:solidFill>
+                                    <a:latin typeface="Cambria Math" panose="02040503050406030204" pitchFamily="18" charset="0"/>
+                                  </a:rPr>
+                                  <m:t>𝑃𝑟𝑖𝑐𝑒𝑈𝑆𝐷</m:t>
+                                </m:r>
+                              </m:oMath>
+                            </m:oMathPara>
+                          </a14:m>
+                          <a:endParaRPr lang="en-AU" sz="1400" dirty="0">
+                            <a:solidFill>
+                              <a:srgbClr val="000000"/>
+                            </a:solidFill>
+                          </a:endParaRPr>
+                        </a:p>
+                      </a:txBody>
+                      <a:tcPr anchor="ctr">
+                        <a:solidFill>
+                          <a:srgbClr val="C0CAF6"/>
+                        </a:solidFill>
+                      </a:tcPr>
+                    </a:tc>
+                    <a:tc>
+                      <a:txBody>
+                        <a:bodyPr/>
+                        <a:lstStyle/>
+                        <a:p>
+                          <a:pPr algn="ctr"/>
+                          <a:r>
+                            <a:rPr lang="en-US" sz="1400" i="1" dirty="0" err="1">
+                              <a:solidFill>
+                                <a:srgbClr val="000000"/>
+                              </a:solidFill>
+                            </a:rPr>
+                            <a:t>CapMrktCurUSD</a:t>
+                          </a:r>
+                          <a:endParaRPr lang="en-AU" sz="1400" i="1" dirty="0">
+                            <a:solidFill>
+                              <a:srgbClr val="000000"/>
+                            </a:solidFill>
+                          </a:endParaRPr>
+                        </a:p>
+                      </a:txBody>
+                      <a:tcPr anchor="ctr">
+                        <a:solidFill>
+                          <a:srgbClr val="C0CAF6"/>
+                        </a:solidFill>
+                      </a:tcPr>
+                    </a:tc>
+                    <a:extLst>
+                      <a:ext uri="{0D108BD9-81ED-4DB2-BD59-A6C34878D82A}">
+                        <a16:rowId xmlns:a16="http://schemas.microsoft.com/office/drawing/2014/main" val="2839142299"/>
+                      </a:ext>
+                    </a:extLst>
+                  </a:tr>
+                  <a:tr h="0">
+                    <a:tc>
+                      <a:txBody>
+                        <a:bodyPr/>
+                        <a:lstStyle/>
+                        <a:p>
+                          <a:pPr algn="ctr"/>
+                          <a:r>
+                            <a:rPr lang="en-US" sz="1400" b="1" dirty="0">
+                              <a:solidFill>
+                                <a:srgbClr val="000000"/>
+                              </a:solidFill>
+                            </a:rPr>
+                            <a:t>Difficulty</a:t>
+                          </a:r>
+                          <a:endParaRPr lang="en-AU" sz="1400" b="1" dirty="0">
+                            <a:solidFill>
+                              <a:srgbClr val="000000"/>
+                            </a:solidFill>
+                          </a:endParaRPr>
+                        </a:p>
+                      </a:txBody>
+                      <a:tcPr anchor="ctr"/>
+                    </a:tc>
+                    <a:tc>
+                      <a:txBody>
+                        <a:bodyPr/>
+                        <a:lstStyle/>
+                        <a:p>
+                          <a:pPr algn="ctr"/>
+                          <a:r>
+                            <a:rPr lang="en-US" sz="1400" dirty="0">
+                              <a:solidFill>
+                                <a:srgbClr val="000000"/>
+                              </a:solidFill>
+                            </a:rPr>
+                            <a:t>Right</a:t>
+                          </a:r>
+                          <a:endParaRPr lang="en-AU" sz="1400" dirty="0">
+                            <a:solidFill>
+                              <a:srgbClr val="000000"/>
+                            </a:solidFill>
+                          </a:endParaRPr>
+                        </a:p>
+                      </a:txBody>
+                      <a:tcPr anchor="ctr"/>
+                    </a:tc>
+                    <a:tc>
+                      <a:txBody>
+                        <a:bodyPr/>
+                        <a:lstStyle/>
+                        <a:p>
+                          <a:pPr algn="ctr"/>
+                          <a14:m>
+                            <m:oMathPara xmlns:m="http://schemas.openxmlformats.org/officeDocument/2006/math">
+                              <m:oMathParaPr>
+                                <m:jc m:val="centerGroup"/>
+                              </m:oMathParaPr>
+                              <m:oMath xmlns:m="http://schemas.openxmlformats.org/officeDocument/2006/math">
+                                <m:r>
+                                  <a:rPr lang="en-US" sz="1400" b="0" i="1" smtClean="0">
+                                    <a:solidFill>
+                                      <a:srgbClr val="000000"/>
+                                    </a:solidFill>
+                                    <a:latin typeface="Cambria Math" panose="02040503050406030204" pitchFamily="18" charset="0"/>
+                                  </a:rPr>
+                                  <m:t>𝐷𝑖𝑓𝑓𝑀𝑒𝑎𝑛</m:t>
+                                </m:r>
+                              </m:oMath>
+                            </m:oMathPara>
+                          </a14:m>
+                          <a:endParaRPr lang="en-AU" sz="1400" dirty="0">
+                            <a:solidFill>
+                              <a:srgbClr val="000000"/>
+                            </a:solidFill>
+                          </a:endParaRPr>
+                        </a:p>
+                      </a:txBody>
+                      <a:tcPr anchor="ctr"/>
+                    </a:tc>
+                    <a:tc>
+                      <a:txBody>
+                        <a:bodyPr/>
+                        <a:lstStyle/>
+                        <a:p>
+                          <a:pPr marL="0" marR="0" lvl="0" indent="0" algn="ctr" defTabSz="914400" rtl="0" eaLnBrk="1" fontAlgn="auto" latinLnBrk="0" hangingPunct="1">
+                            <a:lnSpc>
+                              <a:spcPct val="100000"/>
+                            </a:lnSpc>
+                            <a:spcBef>
+                              <a:spcPts val="0"/>
+                            </a:spcBef>
+                            <a:spcAft>
+                              <a:spcPts val="0"/>
+                            </a:spcAft>
+                            <a:buClrTx/>
+                            <a:buSzTx/>
+                            <a:buFontTx/>
+                            <a:buNone/>
+                            <a:tabLst/>
+                            <a:defRPr/>
+                          </a:pPr>
+                          <a:r>
+                            <a:rPr lang="en-US" sz="1400" i="1" dirty="0" err="1">
+                              <a:solidFill>
+                                <a:srgbClr val="000000"/>
+                              </a:solidFill>
+                            </a:rPr>
+                            <a:t>DiffMean</a:t>
+                          </a:r>
+                          <a:endParaRPr lang="en-AU" sz="1400" i="1" dirty="0">
+                            <a:solidFill>
+                              <a:srgbClr val="000000"/>
+                            </a:solidFill>
+                          </a:endParaRPr>
+                        </a:p>
+                      </a:txBody>
+                      <a:tcPr anchor="ctr"/>
+                    </a:tc>
+                    <a:extLst>
+                      <a:ext uri="{0D108BD9-81ED-4DB2-BD59-A6C34878D82A}">
+                        <a16:rowId xmlns:a16="http://schemas.microsoft.com/office/drawing/2014/main" val="1124067287"/>
+                      </a:ext>
+                    </a:extLst>
+                  </a:tr>
+                  <a:tr h="295881">
+                    <a:tc>
+                      <a:txBody>
+                        <a:bodyPr/>
+                        <a:lstStyle/>
+                        <a:p>
+                          <a:pPr algn="ctr"/>
+                          <a:r>
+                            <a:rPr lang="en-US" sz="1400" b="1" dirty="0">
+                              <a:solidFill>
+                                <a:srgbClr val="000000"/>
+                              </a:solidFill>
+                            </a:rPr>
+                            <a:t>Difficulty Ribbon</a:t>
+                          </a:r>
+                          <a:endParaRPr lang="en-AU" sz="1400" b="1" dirty="0">
+                            <a:solidFill>
+                              <a:srgbClr val="000000"/>
+                            </a:solidFill>
+                          </a:endParaRPr>
+                        </a:p>
+                      </a:txBody>
+                      <a:tcPr anchor="ctr">
+                        <a:solidFill>
+                          <a:srgbClr val="C0CAF6"/>
+                        </a:solidFill>
+                      </a:tcPr>
+                    </a:tc>
+                    <a:tc>
+                      <a:txBody>
+                        <a:bodyPr/>
+                        <a:lstStyle/>
+                        <a:p>
+                          <a:pPr algn="ctr"/>
+                          <a:r>
+                            <a:rPr lang="en-US" sz="1400" dirty="0">
+                              <a:solidFill>
+                                <a:srgbClr val="000000"/>
+                              </a:solidFill>
+                            </a:rPr>
+                            <a:t>Right</a:t>
+                          </a:r>
+                          <a:endParaRPr lang="en-AU" sz="1400" dirty="0">
+                            <a:solidFill>
+                              <a:srgbClr val="000000"/>
+                            </a:solidFill>
+                          </a:endParaRPr>
+                        </a:p>
+                      </a:txBody>
+                      <a:tcPr anchor="ctr">
+                        <a:solidFill>
+                          <a:srgbClr val="C0CAF6"/>
+                        </a:solidFill>
+                      </a:tcPr>
+                    </a:tc>
+                    <a:tc>
+                      <a:txBody>
+                        <a:bodyPr/>
+                        <a:lstStyle/>
+                        <a:p>
+                          <a:pPr algn="ctr"/>
+                          <a14:m>
+                            <m:oMathPara xmlns:m="http://schemas.openxmlformats.org/officeDocument/2006/math">
+                              <m:oMathParaPr>
+                                <m:jc m:val="centerGroup"/>
+                              </m:oMathParaPr>
+                              <m:oMath xmlns:m="http://schemas.openxmlformats.org/officeDocument/2006/math">
+                                <m:r>
+                                  <a:rPr lang="en-US" sz="1400" b="0" i="1" smtClean="0">
+                                    <a:solidFill>
+                                      <a:srgbClr val="000000"/>
+                                    </a:solidFill>
+                                    <a:latin typeface="Cambria Math" panose="02040503050406030204" pitchFamily="18" charset="0"/>
+                                  </a:rPr>
+                                  <m:t>𝑆𝑀𝐴</m:t>
+                                </m:r>
+                                <m:d>
+                                  <m:dPr>
+                                    <m:ctrlPr>
+                                      <a:rPr lang="en-US" sz="1400" b="0" i="1" smtClean="0">
+                                        <a:solidFill>
+                                          <a:srgbClr val="000000"/>
+                                        </a:solidFill>
+                                        <a:latin typeface="Cambria Math" panose="02040503050406030204" pitchFamily="18" charset="0"/>
+                                      </a:rPr>
+                                    </m:ctrlPr>
+                                  </m:dPr>
+                                  <m:e>
+                                    <m:r>
+                                      <a:rPr lang="en-US" sz="1400" b="0" i="1" smtClean="0">
+                                        <a:solidFill>
+                                          <a:srgbClr val="000000"/>
+                                        </a:solidFill>
+                                        <a:latin typeface="Cambria Math" panose="02040503050406030204" pitchFamily="18" charset="0"/>
+                                      </a:rPr>
+                                      <m:t>𝐷𝑖𝑓𝑓𝑀𝑒𝑎𝑛</m:t>
+                                    </m:r>
+                                    <m:r>
+                                      <a:rPr lang="en-US" sz="1400" b="0" i="1" smtClean="0">
+                                        <a:solidFill>
+                                          <a:srgbClr val="000000"/>
+                                        </a:solidFill>
+                                        <a:latin typeface="Cambria Math" panose="02040503050406030204" pitchFamily="18" charset="0"/>
+                                      </a:rPr>
+                                      <m:t>, </m:t>
+                                    </m:r>
+                                    <m:r>
+                                      <a:rPr lang="en-US" sz="1400" b="0" i="1" smtClean="0">
+                                        <a:solidFill>
+                                          <a:srgbClr val="000000"/>
+                                        </a:solidFill>
+                                        <a:latin typeface="Cambria Math" panose="02040503050406030204" pitchFamily="18" charset="0"/>
+                                      </a:rPr>
+                                      <m:t>𝑝𝑒𝑟𝑖𝑜𝑑</m:t>
+                                    </m:r>
+                                  </m:e>
+                                </m:d>
+                              </m:oMath>
+                            </m:oMathPara>
+                          </a14:m>
+                          <a:endParaRPr lang="en-US" sz="1400" b="0" dirty="0">
+                            <a:solidFill>
+                              <a:srgbClr val="000000"/>
+                            </a:solidFill>
+                          </a:endParaRPr>
+                        </a:p>
+                        <a:p>
+                          <a:pPr algn="ctr"/>
+                          <a:r>
+                            <a:rPr lang="en-AU" sz="1400" dirty="0">
+                              <a:solidFill>
+                                <a:srgbClr val="000000"/>
+                              </a:solidFill>
+                            </a:rPr>
+                            <a:t>Period = 9, 14, 25, 40, 60, 90, 128, 200 days</a:t>
+                          </a:r>
+                        </a:p>
+                      </a:txBody>
+                      <a:tcPr anchor="ctr">
+                        <a:solidFill>
+                          <a:srgbClr val="C0CAF6"/>
+                        </a:solidFill>
+                      </a:tcPr>
+                    </a:tc>
+                    <a:tc>
+                      <a:txBody>
+                        <a:bodyPr/>
+                        <a:lstStyle/>
+                        <a:p>
+                          <a:pPr algn="ctr"/>
+                          <a:r>
+                            <a:rPr lang="en-US" sz="1400" i="1" dirty="0" err="1">
+                              <a:solidFill>
+                                <a:srgbClr val="000000"/>
+                              </a:solidFill>
+                            </a:rPr>
+                            <a:t>D_period</a:t>
+                          </a:r>
+                          <a:endParaRPr lang="en-AU" sz="1400" i="1" dirty="0">
+                            <a:solidFill>
+                              <a:srgbClr val="000000"/>
+                            </a:solidFill>
+                          </a:endParaRPr>
+                        </a:p>
+                      </a:txBody>
+                      <a:tcPr anchor="ctr">
+                        <a:solidFill>
+                          <a:srgbClr val="C0CAF6"/>
+                        </a:solidFill>
+                      </a:tcPr>
+                    </a:tc>
+                    <a:extLst>
+                      <a:ext uri="{0D108BD9-81ED-4DB2-BD59-A6C34878D82A}">
+                        <a16:rowId xmlns:a16="http://schemas.microsoft.com/office/drawing/2014/main" val="1250810511"/>
+                      </a:ext>
+                    </a:extLst>
+                  </a:tr>
+                </a:tbl>
+              </a:graphicData>
+            </a:graphic>
+          </p:graphicFrame>
+        </mc:Choice>
+        <mc:Fallback>
+          <p:graphicFrame>
+            <p:nvGraphicFramePr>
+              <p:cNvPr id="4" name="Table 4">
                 <a:extLst>
-                  <a:ext uri="{0D108BD9-81ED-4DB2-BD59-A6C34878D82A}">
-                    <a16:rowId xmlns:a16="http://schemas.microsoft.com/office/drawing/2014/main" val="2839142299"/>
+                  <a:ext uri="{FF2B5EF4-FFF2-40B4-BE49-F238E27FC236}">
+                    <a16:creationId xmlns:a16="http://schemas.microsoft.com/office/drawing/2014/main" id="{87D8962A-526C-40F0-9EB2-4869D124ECF1}"/>
                   </a:ext>
                 </a:extLst>
-              </a:tr>
-              <a:tr h="0">
-                <a:tc>
-                  <a:txBody>
-                    <a:bodyPr/>
-                    <a:lstStyle/>
-                    <a:p>
-                      <a:pPr algn="ctr"/>
-                      <a:endParaRPr lang="en-AU" sz="1400" b="1" dirty="0">
-                        <a:solidFill>
-                          <a:srgbClr val="000000"/>
-                        </a:solidFill>
-                      </a:endParaRPr>
-                    </a:p>
-                  </a:txBody>
-                  <a:tcPr anchor="ctr"/>
-                </a:tc>
-                <a:tc>
-                  <a:txBody>
-                    <a:bodyPr/>
-                    <a:lstStyle/>
-                    <a:p>
-                      <a:pPr algn="ctr"/>
-                      <a:endParaRPr lang="en-AU" sz="1400" dirty="0">
-                        <a:solidFill>
-                          <a:srgbClr val="000000"/>
-                        </a:solidFill>
-                      </a:endParaRPr>
-                    </a:p>
-                  </a:txBody>
-                  <a:tcPr anchor="ctr"/>
-                </a:tc>
-                <a:tc>
-                  <a:txBody>
-                    <a:bodyPr/>
-                    <a:lstStyle/>
-                    <a:p>
-                      <a:pPr algn="ctr"/>
-                      <a:endParaRPr lang="en-AU" sz="1400" dirty="0">
-                        <a:solidFill>
-                          <a:srgbClr val="000000"/>
-                        </a:solidFill>
-                      </a:endParaRPr>
-                    </a:p>
-                  </a:txBody>
-                  <a:tcPr anchor="ctr"/>
-                </a:tc>
-                <a:tc>
-                  <a:txBody>
-                    <a:bodyPr/>
-                    <a:lstStyle/>
-                    <a:p>
-                      <a:pPr marL="0" marR="0" lvl="0" indent="0" algn="ctr" defTabSz="914400" rtl="0" eaLnBrk="1" fontAlgn="auto" latinLnBrk="0" hangingPunct="1">
-                        <a:lnSpc>
-                          <a:spcPct val="100000"/>
-                        </a:lnSpc>
-                        <a:spcBef>
-                          <a:spcPts val="0"/>
-                        </a:spcBef>
-                        <a:spcAft>
-                          <a:spcPts val="0"/>
-                        </a:spcAft>
-                        <a:buClrTx/>
-                        <a:buSzTx/>
-                        <a:buFontTx/>
-                        <a:buNone/>
-                        <a:tabLst/>
-                        <a:defRPr/>
-                      </a:pPr>
-                      <a:endParaRPr lang="en-AU" sz="1400" dirty="0">
-                        <a:solidFill>
-                          <a:srgbClr val="000000"/>
-                        </a:solidFill>
-                      </a:endParaRPr>
-                    </a:p>
-                  </a:txBody>
-                  <a:tcPr anchor="ctr"/>
-                </a:tc>
-                <a:extLst>
-                  <a:ext uri="{0D108BD9-81ED-4DB2-BD59-A6C34878D82A}">
-                    <a16:rowId xmlns:a16="http://schemas.microsoft.com/office/drawing/2014/main" val="1124067287"/>
-                  </a:ext>
-                </a:extLst>
-              </a:tr>
-              <a:tr h="295881">
-                <a:tc>
-                  <a:txBody>
-                    <a:bodyPr/>
-                    <a:lstStyle/>
-                    <a:p>
-                      <a:pPr algn="ctr"/>
-                      <a:endParaRPr lang="en-AU" sz="1400" b="1" dirty="0">
-                        <a:solidFill>
-                          <a:srgbClr val="000000"/>
-                        </a:solidFill>
-                      </a:endParaRPr>
-                    </a:p>
-                  </a:txBody>
-                  <a:tcPr anchor="ctr">
-                    <a:solidFill>
-                      <a:srgbClr val="C0CAF6"/>
-                    </a:solidFill>
-                  </a:tcPr>
-                </a:tc>
-                <a:tc>
-                  <a:txBody>
-                    <a:bodyPr/>
-                    <a:lstStyle/>
-                    <a:p>
-                      <a:pPr algn="ctr"/>
-                      <a:endParaRPr lang="en-AU" sz="1400" dirty="0">
-                        <a:solidFill>
-                          <a:srgbClr val="000000"/>
-                        </a:solidFill>
-                      </a:endParaRPr>
-                    </a:p>
-                  </a:txBody>
-                  <a:tcPr anchor="ctr">
-                    <a:solidFill>
-                      <a:srgbClr val="C0CAF6"/>
-                    </a:solidFill>
-                  </a:tcPr>
-                </a:tc>
-                <a:tc>
-                  <a:txBody>
-                    <a:bodyPr/>
-                    <a:lstStyle/>
-                    <a:p>
-                      <a:pPr algn="ctr"/>
-                      <a:endParaRPr lang="en-AU" sz="1400" dirty="0">
-                        <a:solidFill>
-                          <a:srgbClr val="000000"/>
-                        </a:solidFill>
-                      </a:endParaRPr>
-                    </a:p>
-                  </a:txBody>
-                  <a:tcPr anchor="ctr">
-                    <a:solidFill>
-                      <a:srgbClr val="C0CAF6"/>
-                    </a:solidFill>
-                  </a:tcPr>
-                </a:tc>
-                <a:tc>
-                  <a:txBody>
-                    <a:bodyPr/>
-                    <a:lstStyle/>
-                    <a:p>
-                      <a:pPr algn="ctr"/>
-                      <a:endParaRPr lang="en-AU" sz="1400" dirty="0">
-                        <a:solidFill>
-                          <a:srgbClr val="000000"/>
-                        </a:solidFill>
-                      </a:endParaRPr>
-                    </a:p>
-                  </a:txBody>
-                  <a:tcPr anchor="ctr">
-                    <a:solidFill>
-                      <a:srgbClr val="C0CAF6"/>
-                    </a:solidFill>
-                  </a:tcPr>
-                </a:tc>
-                <a:extLst>
-                  <a:ext uri="{0D108BD9-81ED-4DB2-BD59-A6C34878D82A}">
-                    <a16:rowId xmlns:a16="http://schemas.microsoft.com/office/drawing/2014/main" val="1250810511"/>
-                  </a:ext>
-                </a:extLst>
-              </a:tr>
-            </a:tbl>
-          </a:graphicData>
-        </a:graphic>
-      </p:graphicFrame>
+              </p:cNvPr>
+              <p:cNvGraphicFramePr>
+                <a:graphicFrameLocks noGrp="1"/>
+              </p:cNvGraphicFramePr>
+              <p:nvPr>
+                <p:extLst>
+                  <p:ext uri="{D42A27DB-BD31-4B8C-83A1-F6EECF244321}">
+                    <p14:modId xmlns:p14="http://schemas.microsoft.com/office/powerpoint/2010/main" val="1787008059"/>
+                  </p:ext>
+                </p:extLst>
+              </p:nvPr>
+            </p:nvGraphicFramePr>
+            <p:xfrm>
+              <a:off x="194239" y="3070025"/>
+              <a:ext cx="10760273" cy="1432560"/>
+            </p:xfrm>
+            <a:graphic>
+              <a:graphicData uri="http://schemas.openxmlformats.org/drawingml/2006/table">
+                <a:tbl>
+                  <a:tblPr firstRow="1" bandRow="1">
+                    <a:tableStyleId>{5C22544A-7EE6-4342-B048-85BDC9FD1C3A}</a:tableStyleId>
+                  </a:tblPr>
+                  <a:tblGrid>
+                    <a:gridCol w="1901854">
+                      <a:extLst>
+                        <a:ext uri="{9D8B030D-6E8A-4147-A177-3AD203B41FA5}">
+                          <a16:colId xmlns:a16="http://schemas.microsoft.com/office/drawing/2014/main" val="3592528886"/>
+                        </a:ext>
+                      </a:extLst>
+                    </a:gridCol>
+                    <a:gridCol w="723894">
+                      <a:extLst>
+                        <a:ext uri="{9D8B030D-6E8A-4147-A177-3AD203B41FA5}">
+                          <a16:colId xmlns:a16="http://schemas.microsoft.com/office/drawing/2014/main" val="35831559"/>
+                        </a:ext>
+                      </a:extLst>
+                    </a:gridCol>
+                    <a:gridCol w="5136801">
+                      <a:extLst>
+                        <a:ext uri="{9D8B030D-6E8A-4147-A177-3AD203B41FA5}">
+                          <a16:colId xmlns:a16="http://schemas.microsoft.com/office/drawing/2014/main" val="1110526237"/>
+                        </a:ext>
+                      </a:extLst>
+                    </a:gridCol>
+                    <a:gridCol w="2997724">
+                      <a:extLst>
+                        <a:ext uri="{9D8B030D-6E8A-4147-A177-3AD203B41FA5}">
+                          <a16:colId xmlns:a16="http://schemas.microsoft.com/office/drawing/2014/main" val="3582886717"/>
+                        </a:ext>
+                      </a:extLst>
+                    </a:gridCol>
+                  </a:tblGrid>
+                  <a:tr h="304800">
+                    <a:tc>
+                      <a:txBody>
+                        <a:bodyPr/>
+                        <a:lstStyle/>
+                        <a:p>
+                          <a:pPr algn="ctr"/>
+                          <a:r>
+                            <a:rPr lang="en-US" sz="1400" dirty="0"/>
+                            <a:t>Metric</a:t>
+                          </a:r>
+                          <a:endParaRPr lang="en-AU" sz="1400" dirty="0"/>
+                        </a:p>
+                      </a:txBody>
+                      <a:tcPr>
+                        <a:solidFill>
+                          <a:srgbClr val="091440"/>
+                        </a:solidFill>
+                      </a:tcPr>
+                    </a:tc>
+                    <a:tc>
+                      <a:txBody>
+                        <a:bodyPr/>
+                        <a:lstStyle/>
+                        <a:p>
+                          <a:pPr algn="ctr"/>
+                          <a:r>
+                            <a:rPr lang="en-US" sz="1400" dirty="0"/>
+                            <a:t>Axis</a:t>
+                          </a:r>
+                          <a:endParaRPr lang="en-AU" sz="1400" dirty="0"/>
+                        </a:p>
+                      </a:txBody>
+                      <a:tcPr>
+                        <a:solidFill>
+                          <a:srgbClr val="091440"/>
+                        </a:solidFill>
+                      </a:tcPr>
+                    </a:tc>
+                    <a:tc>
+                      <a:txBody>
+                        <a:bodyPr/>
+                        <a:lstStyle/>
+                        <a:p>
+                          <a:pPr algn="ctr"/>
+                          <a:r>
+                            <a:rPr lang="en-US" sz="1400" dirty="0"/>
+                            <a:t>Calculation</a:t>
+                          </a:r>
+                          <a:endParaRPr lang="en-AU" sz="1400" dirty="0"/>
+                        </a:p>
+                      </a:txBody>
+                      <a:tcPr>
+                        <a:solidFill>
+                          <a:srgbClr val="091440"/>
+                        </a:solidFill>
+                      </a:tcPr>
+                    </a:tc>
+                    <a:tc>
+                      <a:txBody>
+                        <a:bodyPr/>
+                        <a:lstStyle/>
+                        <a:p>
+                          <a:pPr algn="ctr"/>
+                          <a:r>
+                            <a:rPr lang="en-US" sz="1400" dirty="0"/>
+                            <a:t>Naming Convention</a:t>
+                          </a:r>
+                          <a:endParaRPr lang="en-AU" sz="1400" dirty="0"/>
+                        </a:p>
+                      </a:txBody>
+                      <a:tcPr>
+                        <a:solidFill>
+                          <a:srgbClr val="091440"/>
+                        </a:solidFill>
+                      </a:tcPr>
+                    </a:tc>
+                    <a:extLst>
+                      <a:ext uri="{0D108BD9-81ED-4DB2-BD59-A6C34878D82A}">
+                        <a16:rowId xmlns:a16="http://schemas.microsoft.com/office/drawing/2014/main" val="2118214685"/>
+                      </a:ext>
+                    </a:extLst>
+                  </a:tr>
+                  <a:tr h="304800">
+                    <a:tc>
+                      <a:txBody>
+                        <a:bodyPr/>
+                        <a:lstStyle/>
+                        <a:p>
+                          <a:pPr algn="ctr"/>
+                          <a:r>
+                            <a:rPr lang="en-US" sz="1400" b="1" dirty="0">
+                              <a:solidFill>
+                                <a:srgbClr val="000000"/>
+                              </a:solidFill>
+                            </a:rPr>
+                            <a:t>Market Cap</a:t>
+                          </a:r>
+                          <a:endParaRPr lang="en-AU" sz="1400" b="1" dirty="0">
+                            <a:solidFill>
+                              <a:srgbClr val="000000"/>
+                            </a:solidFill>
+                          </a:endParaRPr>
+                        </a:p>
+                      </a:txBody>
+                      <a:tcPr anchor="ctr">
+                        <a:solidFill>
+                          <a:srgbClr val="C0CAF6"/>
+                        </a:solidFill>
+                      </a:tcPr>
+                    </a:tc>
+                    <a:tc>
+                      <a:txBody>
+                        <a:bodyPr/>
+                        <a:lstStyle/>
+                        <a:p>
+                          <a:pPr algn="ctr"/>
+                          <a:r>
+                            <a:rPr lang="en-US" sz="1400" dirty="0">
+                              <a:solidFill>
+                                <a:srgbClr val="000000"/>
+                              </a:solidFill>
+                            </a:rPr>
+                            <a:t>Left</a:t>
+                          </a:r>
+                          <a:endParaRPr lang="en-AU" sz="1400" dirty="0">
+                            <a:solidFill>
+                              <a:srgbClr val="000000"/>
+                            </a:solidFill>
+                          </a:endParaRPr>
+                        </a:p>
+                      </a:txBody>
+                      <a:tcPr anchor="ctr">
+                        <a:solidFill>
+                          <a:srgbClr val="C0CAF6"/>
+                        </a:solidFill>
+                      </a:tcPr>
+                    </a:tc>
+                    <a:tc>
+                      <a:txBody>
+                        <a:bodyPr/>
+                        <a:lstStyle/>
+                        <a:p>
+                          <a:endParaRPr lang="en-US"/>
+                        </a:p>
+                      </a:txBody>
+                      <a:tcPr anchor="ctr">
+                        <a:blipFill>
+                          <a:blip r:embed="rId2"/>
+                          <a:stretch>
+                            <a:fillRect l="-51246" t="-102000" r="-58956" b="-292000"/>
+                          </a:stretch>
+                        </a:blipFill>
+                      </a:tcPr>
+                    </a:tc>
+                    <a:tc>
+                      <a:txBody>
+                        <a:bodyPr/>
+                        <a:lstStyle/>
+                        <a:p>
+                          <a:pPr algn="ctr"/>
+                          <a:r>
+                            <a:rPr lang="en-US" sz="1400" i="1" dirty="0" err="1">
+                              <a:solidFill>
+                                <a:srgbClr val="000000"/>
+                              </a:solidFill>
+                            </a:rPr>
+                            <a:t>CapMrktCurUSD</a:t>
+                          </a:r>
+                          <a:endParaRPr lang="en-AU" sz="1400" i="1" dirty="0">
+                            <a:solidFill>
+                              <a:srgbClr val="000000"/>
+                            </a:solidFill>
+                          </a:endParaRPr>
+                        </a:p>
+                      </a:txBody>
+                      <a:tcPr anchor="ctr">
+                        <a:solidFill>
+                          <a:srgbClr val="C0CAF6"/>
+                        </a:solidFill>
+                      </a:tcPr>
+                    </a:tc>
+                    <a:extLst>
+                      <a:ext uri="{0D108BD9-81ED-4DB2-BD59-A6C34878D82A}">
+                        <a16:rowId xmlns:a16="http://schemas.microsoft.com/office/drawing/2014/main" val="2839142299"/>
+                      </a:ext>
+                    </a:extLst>
+                  </a:tr>
+                  <a:tr h="304800">
+                    <a:tc>
+                      <a:txBody>
+                        <a:bodyPr/>
+                        <a:lstStyle/>
+                        <a:p>
+                          <a:pPr algn="ctr"/>
+                          <a:r>
+                            <a:rPr lang="en-US" sz="1400" b="1" dirty="0">
+                              <a:solidFill>
+                                <a:srgbClr val="000000"/>
+                              </a:solidFill>
+                            </a:rPr>
+                            <a:t>Difficulty</a:t>
+                          </a:r>
+                          <a:endParaRPr lang="en-AU" sz="1400" b="1" dirty="0">
+                            <a:solidFill>
+                              <a:srgbClr val="000000"/>
+                            </a:solidFill>
+                          </a:endParaRPr>
+                        </a:p>
+                      </a:txBody>
+                      <a:tcPr anchor="ctr"/>
+                    </a:tc>
+                    <a:tc>
+                      <a:txBody>
+                        <a:bodyPr/>
+                        <a:lstStyle/>
+                        <a:p>
+                          <a:pPr algn="ctr"/>
+                          <a:r>
+                            <a:rPr lang="en-US" sz="1400" dirty="0">
+                              <a:solidFill>
+                                <a:srgbClr val="000000"/>
+                              </a:solidFill>
+                            </a:rPr>
+                            <a:t>Right</a:t>
+                          </a:r>
+                          <a:endParaRPr lang="en-AU" sz="1400" dirty="0">
+                            <a:solidFill>
+                              <a:srgbClr val="000000"/>
+                            </a:solidFill>
+                          </a:endParaRPr>
+                        </a:p>
+                      </a:txBody>
+                      <a:tcPr anchor="ctr"/>
+                    </a:tc>
+                    <a:tc>
+                      <a:txBody>
+                        <a:bodyPr/>
+                        <a:lstStyle/>
+                        <a:p>
+                          <a:endParaRPr lang="en-US"/>
+                        </a:p>
+                      </a:txBody>
+                      <a:tcPr anchor="ctr">
+                        <a:blipFill>
+                          <a:blip r:embed="rId2"/>
+                          <a:stretch>
+                            <a:fillRect l="-51246" t="-198039" r="-58956" b="-186275"/>
+                          </a:stretch>
+                        </a:blipFill>
+                      </a:tcPr>
+                    </a:tc>
+                    <a:tc>
+                      <a:txBody>
+                        <a:bodyPr/>
+                        <a:lstStyle/>
+                        <a:p>
+                          <a:pPr marL="0" marR="0" lvl="0" indent="0" algn="ctr" defTabSz="914400" rtl="0" eaLnBrk="1" fontAlgn="auto" latinLnBrk="0" hangingPunct="1">
+                            <a:lnSpc>
+                              <a:spcPct val="100000"/>
+                            </a:lnSpc>
+                            <a:spcBef>
+                              <a:spcPts val="0"/>
+                            </a:spcBef>
+                            <a:spcAft>
+                              <a:spcPts val="0"/>
+                            </a:spcAft>
+                            <a:buClrTx/>
+                            <a:buSzTx/>
+                            <a:buFontTx/>
+                            <a:buNone/>
+                            <a:tabLst/>
+                            <a:defRPr/>
+                          </a:pPr>
+                          <a:r>
+                            <a:rPr lang="en-US" sz="1400" i="1" dirty="0" err="1">
+                              <a:solidFill>
+                                <a:srgbClr val="000000"/>
+                              </a:solidFill>
+                            </a:rPr>
+                            <a:t>DiffMean</a:t>
+                          </a:r>
+                          <a:endParaRPr lang="en-AU" sz="1400" i="1" dirty="0">
+                            <a:solidFill>
+                              <a:srgbClr val="000000"/>
+                            </a:solidFill>
+                          </a:endParaRPr>
+                        </a:p>
+                      </a:txBody>
+                      <a:tcPr anchor="ctr"/>
+                    </a:tc>
+                    <a:extLst>
+                      <a:ext uri="{0D108BD9-81ED-4DB2-BD59-A6C34878D82A}">
+                        <a16:rowId xmlns:a16="http://schemas.microsoft.com/office/drawing/2014/main" val="1124067287"/>
+                      </a:ext>
+                    </a:extLst>
+                  </a:tr>
+                  <a:tr h="518160">
+                    <a:tc>
+                      <a:txBody>
+                        <a:bodyPr/>
+                        <a:lstStyle/>
+                        <a:p>
+                          <a:pPr algn="ctr"/>
+                          <a:r>
+                            <a:rPr lang="en-US" sz="1400" b="1" dirty="0">
+                              <a:solidFill>
+                                <a:srgbClr val="000000"/>
+                              </a:solidFill>
+                            </a:rPr>
+                            <a:t>Difficulty Ribbon</a:t>
+                          </a:r>
+                          <a:endParaRPr lang="en-AU" sz="1400" b="1" dirty="0">
+                            <a:solidFill>
+                              <a:srgbClr val="000000"/>
+                            </a:solidFill>
+                          </a:endParaRPr>
+                        </a:p>
+                      </a:txBody>
+                      <a:tcPr anchor="ctr">
+                        <a:solidFill>
+                          <a:srgbClr val="C0CAF6"/>
+                        </a:solidFill>
+                      </a:tcPr>
+                    </a:tc>
+                    <a:tc>
+                      <a:txBody>
+                        <a:bodyPr/>
+                        <a:lstStyle/>
+                        <a:p>
+                          <a:pPr algn="ctr"/>
+                          <a:r>
+                            <a:rPr lang="en-US" sz="1400" dirty="0">
+                              <a:solidFill>
+                                <a:srgbClr val="000000"/>
+                              </a:solidFill>
+                            </a:rPr>
+                            <a:t>Right</a:t>
+                          </a:r>
+                          <a:endParaRPr lang="en-AU" sz="1400" dirty="0">
+                            <a:solidFill>
+                              <a:srgbClr val="000000"/>
+                            </a:solidFill>
+                          </a:endParaRPr>
+                        </a:p>
+                      </a:txBody>
+                      <a:tcPr anchor="ctr">
+                        <a:solidFill>
+                          <a:srgbClr val="C0CAF6"/>
+                        </a:solidFill>
+                      </a:tcPr>
+                    </a:tc>
+                    <a:tc>
+                      <a:txBody>
+                        <a:bodyPr/>
+                        <a:lstStyle/>
+                        <a:p>
+                          <a:endParaRPr lang="en-US"/>
+                        </a:p>
+                      </a:txBody>
+                      <a:tcPr anchor="ctr">
+                        <a:blipFill>
+                          <a:blip r:embed="rId2"/>
+                          <a:stretch>
+                            <a:fillRect l="-51246" t="-178824" r="-58956" b="-11765"/>
+                          </a:stretch>
+                        </a:blipFill>
+                      </a:tcPr>
+                    </a:tc>
+                    <a:tc>
+                      <a:txBody>
+                        <a:bodyPr/>
+                        <a:lstStyle/>
+                        <a:p>
+                          <a:pPr algn="ctr"/>
+                          <a:r>
+                            <a:rPr lang="en-US" sz="1400" i="1" dirty="0" err="1">
+                              <a:solidFill>
+                                <a:srgbClr val="000000"/>
+                              </a:solidFill>
+                            </a:rPr>
+                            <a:t>D_period</a:t>
+                          </a:r>
+                          <a:endParaRPr lang="en-AU" sz="1400" i="1" dirty="0">
+                            <a:solidFill>
+                              <a:srgbClr val="000000"/>
+                            </a:solidFill>
+                          </a:endParaRPr>
+                        </a:p>
+                      </a:txBody>
+                      <a:tcPr anchor="ctr">
+                        <a:solidFill>
+                          <a:srgbClr val="C0CAF6"/>
+                        </a:solidFill>
+                      </a:tcPr>
+                    </a:tc>
+                    <a:extLst>
+                      <a:ext uri="{0D108BD9-81ED-4DB2-BD59-A6C34878D82A}">
+                        <a16:rowId xmlns:a16="http://schemas.microsoft.com/office/drawing/2014/main" val="1250810511"/>
+                      </a:ext>
+                    </a:extLst>
+                  </a:tr>
+                </a:tbl>
+              </a:graphicData>
+            </a:graphic>
+          </p:graphicFrame>
+        </mc:Fallback>
+      </mc:AlternateContent>
       <p:sp>
         <p:nvSpPr>
           <p:cNvPr id="5" name="TextBox 4">
@@ -12173,6 +12806,159 @@
           </a:p>
         </p:txBody>
       </p:sp>
+      <p:grpSp>
+        <p:nvGrpSpPr>
+          <p:cNvPr id="8" name="Group 7">
+            <a:extLst>
+              <a:ext uri="{FF2B5EF4-FFF2-40B4-BE49-F238E27FC236}">
+                <a16:creationId xmlns:a16="http://schemas.microsoft.com/office/drawing/2014/main" id="{1AE31ACD-BFC5-4E65-9E4A-DC3048AB6233}"/>
+              </a:ext>
+            </a:extLst>
+          </p:cNvPr>
+          <p:cNvGrpSpPr/>
+          <p:nvPr/>
+        </p:nvGrpSpPr>
+        <p:grpSpPr>
+          <a:xfrm>
+            <a:off x="0" y="621165"/>
+            <a:ext cx="11302738" cy="5206073"/>
+            <a:chOff x="0" y="621165"/>
+            <a:chExt cx="11302738" cy="5206073"/>
+          </a:xfrm>
+        </p:grpSpPr>
+        <p:grpSp>
+          <p:nvGrpSpPr>
+            <p:cNvPr id="4" name="Group 3">
+              <a:extLst>
+                <a:ext uri="{FF2B5EF4-FFF2-40B4-BE49-F238E27FC236}">
+                  <a16:creationId xmlns:a16="http://schemas.microsoft.com/office/drawing/2014/main" id="{47ECF809-5DA2-4933-BD4E-AA9FF4D0355D}"/>
+                </a:ext>
+              </a:extLst>
+            </p:cNvPr>
+            <p:cNvGrpSpPr/>
+            <p:nvPr/>
+          </p:nvGrpSpPr>
+          <p:grpSpPr>
+            <a:xfrm>
+              <a:off x="0" y="621165"/>
+              <a:ext cx="11302738" cy="5206073"/>
+              <a:chOff x="0" y="621165"/>
+              <a:chExt cx="11302738" cy="5206073"/>
+            </a:xfrm>
+          </p:grpSpPr>
+          <p:pic>
+            <p:nvPicPr>
+              <p:cNvPr id="2" name="Picture 1">
+                <a:extLst>
+                  <a:ext uri="{FF2B5EF4-FFF2-40B4-BE49-F238E27FC236}">
+                    <a16:creationId xmlns:a16="http://schemas.microsoft.com/office/drawing/2014/main" id="{993F6480-592B-4207-8CD6-0CDB6CA9CD3E}"/>
+                  </a:ext>
+                </a:extLst>
+              </p:cNvPr>
+              <p:cNvPicPr>
+                <a:picLocks noChangeAspect="1"/>
+              </p:cNvPicPr>
+              <p:nvPr/>
+            </p:nvPicPr>
+            <p:blipFill>
+              <a:blip r:embed="rId2"/>
+              <a:stretch>
+                <a:fillRect/>
+              </a:stretch>
+            </p:blipFill>
+            <p:spPr>
+              <a:xfrm>
+                <a:off x="0" y="621165"/>
+                <a:ext cx="11302738" cy="5206073"/>
+              </a:xfrm>
+              <a:prstGeom prst="rect">
+                <a:avLst/>
+              </a:prstGeom>
+            </p:spPr>
+          </p:pic>
+          <p:sp>
+            <p:nvSpPr>
+              <p:cNvPr id="7" name="Rectangle 6">
+                <a:extLst>
+                  <a:ext uri="{FF2B5EF4-FFF2-40B4-BE49-F238E27FC236}">
+                    <a16:creationId xmlns:a16="http://schemas.microsoft.com/office/drawing/2014/main" id="{DEF88020-B00F-4A65-AA1E-46CF432389B9}"/>
+                  </a:ext>
+                </a:extLst>
+              </p:cNvPr>
+              <p:cNvSpPr/>
+              <p:nvPr/>
+            </p:nvSpPr>
+            <p:spPr>
+              <a:xfrm>
+                <a:off x="9944469" y="3027685"/>
+                <a:ext cx="1358269" cy="2326103"/>
+              </a:xfrm>
+              <a:prstGeom prst="rect">
+                <a:avLst/>
+              </a:prstGeom>
+              <a:solidFill>
+                <a:srgbClr val="141414"/>
+              </a:solidFill>
+              <a:ln>
+                <a:noFill/>
+              </a:ln>
+            </p:spPr>
+            <p:style>
+              <a:lnRef idx="2">
+                <a:schemeClr val="accent1">
+                  <a:shade val="50000"/>
+                </a:schemeClr>
+              </a:lnRef>
+              <a:fillRef idx="1">
+                <a:schemeClr val="accent1"/>
+              </a:fillRef>
+              <a:effectRef idx="0">
+                <a:schemeClr val="accent1"/>
+              </a:effectRef>
+              <a:fontRef idx="minor">
+                <a:schemeClr val="lt1"/>
+              </a:fontRef>
+            </p:style>
+            <p:txBody>
+              <a:bodyPr rtlCol="0" anchor="ctr"/>
+              <a:lstStyle/>
+              <a:p>
+                <a:pPr algn="ctr"/>
+                <a:endParaRPr lang="en-AU"/>
+              </a:p>
+            </p:txBody>
+          </p:sp>
+        </p:grpSp>
+        <p:pic>
+          <p:nvPicPr>
+            <p:cNvPr id="5" name="Picture 4">
+              <a:extLst>
+                <a:ext uri="{FF2B5EF4-FFF2-40B4-BE49-F238E27FC236}">
+                  <a16:creationId xmlns:a16="http://schemas.microsoft.com/office/drawing/2014/main" id="{D9A1D7EC-DBFB-4799-A5DC-3825D6C31BD2}"/>
+                </a:ext>
+              </a:extLst>
+            </p:cNvPr>
+            <p:cNvPicPr>
+              <a:picLocks noChangeAspect="1"/>
+            </p:cNvPicPr>
+            <p:nvPr/>
+          </p:nvPicPr>
+          <p:blipFill rotWithShape="1">
+            <a:blip r:embed="rId2"/>
+            <a:srcRect l="88912" t="42296" b="22406"/>
+            <a:stretch/>
+          </p:blipFill>
+          <p:spPr>
+            <a:xfrm>
+              <a:off x="10049522" y="1837677"/>
+              <a:ext cx="1253216" cy="1837678"/>
+            </a:xfrm>
+            <a:prstGeom prst="rect">
+              <a:avLst/>
+            </a:prstGeom>
+          </p:spPr>
+        </p:pic>
+      </p:grpSp>
     </p:spTree>
     <p:extLst>
       <p:ext uri="{BB962C8B-B14F-4D97-AF65-F5344CB8AC3E}">
